--- a/Final Presentation.pptx
+++ b/Final Presentation.pptx
@@ -3849,81 +3849,34 @@
           </a:p>
         </p:txBody>
       </p:sp>
-      <p:sp>
-        <p:nvSpPr>
-          <p:cNvPr id="3" name="내용 개체 틀 2">
-            <a:extLst>
-              <a:ext uri="{FF2B5EF4-FFF2-40B4-BE49-F238E27FC236}">
-                <a16:creationId xmlns:a16="http://schemas.microsoft.com/office/drawing/2014/main" id="{B8CD7EDC-4C61-CF32-16D1-CB5E1862C8B1}"/>
-              </a:ext>
-            </a:extLst>
-          </p:cNvPr>
-          <p:cNvSpPr>
-            <a:spLocks noGrp="1"/>
-          </p:cNvSpPr>
-          <p:nvPr>
-            <p:ph idx="1"/>
-          </p:nvPr>
-        </p:nvSpPr>
-        <p:spPr>
-          <a:xfrm>
-            <a:off x="683787" y="1165684"/>
-            <a:ext cx="10515600" cy="5283506"/>
-          </a:xfrm>
-        </p:spPr>
-        <p:txBody>
-          <a:bodyPr/>
-          <a:lstStyle/>
-          <a:p>
-            <a:endParaRPr lang="ko-KR" altLang="en-US" dirty="0"/>
-          </a:p>
-        </p:txBody>
-      </p:sp>
       <p:pic>
         <p:nvPicPr>
-          <p:cNvPr id="4" name="Picture 2">
-            <a:extLst>
-              <a:ext uri="{FF2B5EF4-FFF2-40B4-BE49-F238E27FC236}">
-                <a16:creationId xmlns:a16="http://schemas.microsoft.com/office/drawing/2014/main" id="{681604E1-139A-176A-90DB-E36707B6F8C6}"/>
+          <p:cNvPr id="5" name="그림 4">
+            <a:extLst>
+              <a:ext uri="{FF2B5EF4-FFF2-40B4-BE49-F238E27FC236}">
+                <a16:creationId xmlns:a16="http://schemas.microsoft.com/office/drawing/2014/main" id="{9ED9B501-8198-4502-A501-0F656367C415}"/>
               </a:ext>
             </a:extLst>
           </p:cNvPr>
           <p:cNvPicPr>
-            <a:picLocks noChangeAspect="1" noChangeArrowheads="1"/>
+            <a:picLocks noChangeAspect="1"/>
           </p:cNvPicPr>
           <p:nvPr/>
         </p:nvPicPr>
-        <p:blipFill rotWithShape="1">
-          <a:blip r:embed="rId2">
-            <a:extLst>
-              <a:ext uri="{28A0092B-C50C-407E-A947-70E740481C1C}">
-                <a14:useLocalDpi xmlns:a14="http://schemas.microsoft.com/office/drawing/2010/main" val="0"/>
-              </a:ext>
-            </a:extLst>
-          </a:blip>
-          <a:srcRect l="109" t="80777" r="-109" b="-1736"/>
+        <p:blipFill>
+          <a:blip r:embed="rId2"/>
           <a:stretch>
             <a:fillRect/>
           </a:stretch>
         </p:blipFill>
-        <p:spPr bwMode="auto">
-          <a:xfrm>
-            <a:off x="1808742" y="3429000"/>
-            <a:ext cx="8574516" cy="2592469"/>
+        <p:spPr>
+          <a:xfrm>
+            <a:off x="2852737" y="1345832"/>
+            <a:ext cx="6486525" cy="4807267"/>
           </a:xfrm>
           <a:prstGeom prst="rect">
             <a:avLst/>
           </a:prstGeom>
-          <a:noFill/>
-          <a:extLst>
-            <a:ext uri="{909E8E84-426E-40DD-AFC4-6F175D3DCCD1}">
-              <a14:hiddenFill xmlns:a14="http://schemas.microsoft.com/office/drawing/2010/main">
-                <a:solidFill>
-                  <a:srgbClr val="FFFFFF"/>
-                </a:solidFill>
-              </a14:hiddenFill>
-            </a:ext>
-          </a:extLst>
         </p:spPr>
       </p:pic>
     </p:spTree>
@@ -4061,10 +4014,13 @@
             <a:pPr lvl="1"/>
             <a:r>
               <a:rPr lang="en-US" altLang="ko-KR" dirty="0"/>
-              <a:t>Sorting didn’t work well when moving from self-made dataset to the given one </a:t>
-            </a:r>
-          </a:p>
-          <a:p>
+              <a:t>Debugging non-deterministic timing issues in parallel file sorting and partitioning</a:t>
+            </a:r>
+          </a:p>
+          <a:p>
+            <a:pPr marL="0" indent="0">
+              <a:buNone/>
+            </a:pPr>
             <a:endParaRPr lang="en-US" altLang="ko-KR" dirty="0"/>
           </a:p>
         </p:txBody>
@@ -4670,6 +4626,51 @@
                                     <p:set>
                                       <p:cBhvr>
                                         <p:cTn id="6" dur="1" fill="hold">
+                                          <p:stCondLst>
+                                            <p:cond delay="0"/>
+                                          </p:stCondLst>
+                                        </p:cTn>
+                                        <p:tgtEl>
+                                          <p:spTgt spid="9"/>
+                                        </p:tgtEl>
+                                        <p:attrNameLst>
+                                          <p:attrName>style.visibility</p:attrName>
+                                        </p:attrNameLst>
+                                      </p:cBhvr>
+                                      <p:to>
+                                        <p:strVal val="visible"/>
+                                      </p:to>
+                                    </p:set>
+                                  </p:childTnLst>
+                                </p:cTn>
+                              </p:par>
+                            </p:childTnLst>
+                          </p:cTn>
+                        </p:par>
+                      </p:childTnLst>
+                    </p:cTn>
+                  </p:par>
+                  <p:par>
+                    <p:cTn id="7" fill="hold">
+                      <p:stCondLst>
+                        <p:cond delay="indefinite"/>
+                      </p:stCondLst>
+                      <p:childTnLst>
+                        <p:par>
+                          <p:cTn id="8" fill="hold">
+                            <p:stCondLst>
+                              <p:cond delay="0"/>
+                            </p:stCondLst>
+                            <p:childTnLst>
+                              <p:par>
+                                <p:cTn id="9" presetID="1" presetClass="entr" presetSubtype="0" fill="hold" nodeType="clickEffect">
+                                  <p:stCondLst>
+                                    <p:cond delay="0"/>
+                                  </p:stCondLst>
+                                  <p:childTnLst>
+                                    <p:set>
+                                      <p:cBhvr>
+                                        <p:cTn id="10" dur="1" fill="hold">
                                           <p:stCondLst>
                                             <p:cond delay="0"/>
                                           </p:stCondLst>
@@ -6856,8 +6857,8 @@
         </p:blipFill>
         <p:spPr>
           <a:xfrm>
-            <a:off x="5518295" y="2250259"/>
-            <a:ext cx="6380880" cy="3422191"/>
+            <a:off x="5157074" y="4434568"/>
+            <a:ext cx="4192199" cy="2248358"/>
           </a:xfrm>
           <a:prstGeom prst="rect">
             <a:avLst/>
@@ -6892,8 +6893,8 @@
         </p:blipFill>
         <p:spPr>
           <a:xfrm>
-            <a:off x="469182" y="2250259"/>
-            <a:ext cx="4834508" cy="1464468"/>
+            <a:off x="7933043" y="1126612"/>
+            <a:ext cx="3299923" cy="999612"/>
           </a:xfrm>
           <a:prstGeom prst="rect">
             <a:avLst/>
@@ -6929,8 +6930,116 @@
         </p:blipFill>
         <p:spPr>
           <a:xfrm>
-            <a:off x="292825" y="3916849"/>
-            <a:ext cx="4996636" cy="1429270"/>
+            <a:off x="7933043" y="69557"/>
+            <a:ext cx="3420757" cy="978496"/>
+          </a:xfrm>
+          <a:prstGeom prst="rect">
+            <a:avLst/>
+          </a:prstGeom>
+        </p:spPr>
+      </p:pic>
+      <p:pic>
+        <p:nvPicPr>
+          <p:cNvPr id="6" name="그림 5" descr="텍스트, 스크린샷, 폰트이(가) 표시된 사진&#10;&#10;AI 생성 콘텐츠는 정확하지 않을 수 있습니다.">
+            <a:extLst>
+              <a:ext uri="{FF2B5EF4-FFF2-40B4-BE49-F238E27FC236}">
+                <a16:creationId xmlns:a16="http://schemas.microsoft.com/office/drawing/2014/main" id="{F01B9175-111F-38ED-CCB7-A3AE823EACA4}"/>
+              </a:ext>
+            </a:extLst>
+          </p:cNvPr>
+          <p:cNvPicPr>
+            <a:picLocks noChangeAspect="1"/>
+          </p:cNvPicPr>
+          <p:nvPr/>
+        </p:nvPicPr>
+        <p:blipFill>
+          <a:blip r:embed="rId5">
+            <a:extLst>
+              <a:ext uri="{28A0092B-C50C-407E-A947-70E740481C1C}">
+                <a14:useLocalDpi xmlns:a14="http://schemas.microsoft.com/office/drawing/2010/main" val="0"/>
+              </a:ext>
+            </a:extLst>
+          </a:blip>
+          <a:stretch>
+            <a:fillRect/>
+          </a:stretch>
+        </p:blipFill>
+        <p:spPr>
+          <a:xfrm>
+            <a:off x="5157075" y="2202988"/>
+            <a:ext cx="4473288" cy="2154816"/>
+          </a:xfrm>
+          <a:prstGeom prst="rect">
+            <a:avLst/>
+          </a:prstGeom>
+        </p:spPr>
+      </p:pic>
+      <p:pic>
+        <p:nvPicPr>
+          <p:cNvPr id="9" name="그림 8" descr="텍스트, 스크린샷, 폰트이(가) 표시된 사진&#10;&#10;AI 생성 콘텐츠는 정확하지 않을 수 있습니다.">
+            <a:extLst>
+              <a:ext uri="{FF2B5EF4-FFF2-40B4-BE49-F238E27FC236}">
+                <a16:creationId xmlns:a16="http://schemas.microsoft.com/office/drawing/2014/main" id="{58E8B77D-5D1A-6FBC-4281-F611EB94AFD5}"/>
+              </a:ext>
+            </a:extLst>
+          </p:cNvPr>
+          <p:cNvPicPr>
+            <a:picLocks noChangeAspect="1"/>
+          </p:cNvPicPr>
+          <p:nvPr/>
+        </p:nvPicPr>
+        <p:blipFill>
+          <a:blip r:embed="rId6">
+            <a:extLst>
+              <a:ext uri="{28A0092B-C50C-407E-A947-70E740481C1C}">
+                <a14:useLocalDpi xmlns:a14="http://schemas.microsoft.com/office/drawing/2010/main" val="0"/>
+              </a:ext>
+            </a:extLst>
+          </a:blip>
+          <a:stretch>
+            <a:fillRect/>
+          </a:stretch>
+        </p:blipFill>
+        <p:spPr>
+          <a:xfrm>
+            <a:off x="301882" y="4458605"/>
+            <a:ext cx="4569561" cy="2192707"/>
+          </a:xfrm>
+          <a:prstGeom prst="rect">
+            <a:avLst/>
+          </a:prstGeom>
+        </p:spPr>
+      </p:pic>
+      <p:pic>
+        <p:nvPicPr>
+          <p:cNvPr id="11" name="그림 10" descr="텍스트, 스크린샷, 폰트이(가) 표시된 사진&#10;&#10;AI 생성 콘텐츠는 정확하지 않을 수 있습니다.">
+            <a:extLst>
+              <a:ext uri="{FF2B5EF4-FFF2-40B4-BE49-F238E27FC236}">
+                <a16:creationId xmlns:a16="http://schemas.microsoft.com/office/drawing/2014/main" id="{BDD1C855-99FF-8000-44B9-D253EDF74906}"/>
+              </a:ext>
+            </a:extLst>
+          </p:cNvPr>
+          <p:cNvPicPr>
+            <a:picLocks noChangeAspect="1"/>
+          </p:cNvPicPr>
+          <p:nvPr/>
+        </p:nvPicPr>
+        <p:blipFill>
+          <a:blip r:embed="rId7">
+            <a:extLst>
+              <a:ext uri="{28A0092B-C50C-407E-A947-70E740481C1C}">
+                <a14:useLocalDpi xmlns:a14="http://schemas.microsoft.com/office/drawing/2010/main" val="0"/>
+              </a:ext>
+            </a:extLst>
+          </a:blip>
+          <a:stretch>
+            <a:fillRect/>
+          </a:stretch>
+        </p:blipFill>
+        <p:spPr>
+          <a:xfrm>
+            <a:off x="301882" y="2202988"/>
+            <a:ext cx="4473288" cy="2143522"/>
           </a:xfrm>
           <a:prstGeom prst="rect">
             <a:avLst/>
